--- a/docs/deck/RuleMind-AI.pptx
+++ b/docs/deck/RuleMind-AI.pptx
@@ -2959,7 +2959,7 @@
                 <a:ea typeface="Calibri" pitchFamily="34" charset="-122"/>
                 <a:cs typeface="Calibri" pitchFamily="34" charset="-120"/>
               </a:rPr>
-              <a:t>external dependencies at runtime</a:t>
+              <a:t>phone-home, metering or licence calls</a:t>
             </a:r>
             <a:endParaRPr lang="en-US" sz="1100" dirty="0"/>
           </a:p>

--- a/docs/deck/RuleMind-AI.pptx
+++ b/docs/deck/RuleMind-AI.pptx
@@ -11535,7 +11535,7 @@
                 <a:ea typeface="Calibri" pitchFamily="34" charset="-122"/>
                 <a:cs typeface="Calibri" pitchFamily="34" charset="-120"/>
               </a:rPr>
-              <a:t>Viewer, author, approver, admin and service, enforced at the API rather than in the UI, and tested as a matrix rather than a single happy path.</a:t>
+              <a:t>Owner, admin, policy_maker, reviewer and viewer — enforced at the API by capability, not hidden in the UI, and tested as a matrix rather than a single happy path.</a:t>
             </a:r>
             <a:endParaRPr lang="en-US" sz="1100" dirty="0"/>
           </a:p>

--- a/docs/deck/RuleMind-AI.pptx
+++ b/docs/deck/RuleMind-AI.pptx
@@ -1428,7 +1428,8 @@
           <a:p>
             <a:r>
               <a:rPr lang="en-US" dirty="0"/>
-              <a:t>The pipeline is the product in one line. Emphasise step 1: source-agnostic means we do not sell you a bureau integration — you bring whatever you already pay for.</a:t>
+              <a:t>The pipeline is the product in one line. Emphasise step 1: source-agnostic means we do not sell you a bureau integration — you bring whatever you already pay for.
+On step 5, say REASONING, not 'policy version'. A server-side decision records what actually happened — the payload, the variables computed, every rule result, the scorecard breakdown and the step trace — but it does NOT pin a policy version (bundle_hash is null for API decisions; it is populated only for on-device ones). That is the honest answer and it is also the better one: a stored trace is stronger evidence than a pointer to configuration that may have changed since. If a buyer asks specifically for version pinning on server decisions, it is a roadmap item, not a shipped one.</a:t>
             </a:r>
             <a:endParaRPr lang="en-US" dirty="0"/>
           </a:p>
@@ -6641,7 +6642,7 @@
                 <a:ea typeface="Calibri" pitchFamily="34" charset="-122"/>
                 <a:cs typeface="Calibri" pitchFamily="34" charset="-120"/>
               </a:rPr>
-              <a:t>Every decision written with its policy version, inputs and reasoning. Tamper-evident chain.</a:t>
+              <a:t>Every decision stores its inputs, computed variables, every rule result and the full step trace.</a:t>
             </a:r>
             <a:endParaRPr lang="en-US" sz="1150" dirty="0"/>
           </a:p>

--- a/docs/deck/RuleMind-AI.pptx
+++ b/docs/deck/RuleMind-AI.pptx
@@ -1957,7 +1957,8 @@
           <a:p>
             <a:r>
               <a:rPr lang="en-US" dirty="0"/>
-              <a:t>For a regulated buyer this slide often outranks the feature slides. Apache 2.0 licensed is accurate; the repository is not public today, so do not say 'open source' as a present fact.</a:t>
+              <a:t>For a regulated buyer this slide often outranks the feature slides. Apache 2.0 licensed is accurate; the repository is not public today, so do not say 'open source' as a present fact.
+Do NOT say 'no data leaves your network' — connectors call the data sources the customer configures, which is the entire point of a bureau integration, and the AI features call the provider whose key they supplied. What is true is that WE receive nothing: no telemetry, no metering, no licence check. Every outbound call is one they chose, and the bottom row of this slide says how those are guarded.</a:t>
             </a:r>
             <a:endParaRPr lang="en-US" dirty="0"/>
           </a:p>
@@ -12139,7 +12140,7 @@
                 <a:ea typeface="Calibri" pitchFamily="34" charset="-122"/>
                 <a:cs typeface="Calibri" pitchFamily="34" charset="-120"/>
               </a:rPr>
-              <a:t>No vendor cloud, no data leaving your network, no per-decision metering. Two supported paths, each with a committed smoke test that proves the install rather than describing it.</a:t>
+              <a:t>No vendor cloud, no telemetry, no per-decision metering. The only outbound calls are the ones you configure. Two supported paths, each with a committed smoke test that proves the install rather than describing it.</a:t>
             </a:r>
             <a:endParaRPr lang="en-US" sz="1400" dirty="0"/>
           </a:p>

--- a/docs/deck/RuleMind-AI.pptx
+++ b/docs/deck/RuleMind-AI.pptx
@@ -1605,7 +1605,8 @@
           <a:p>
             <a:r>
               <a:rPr lang="en-US" dirty="0"/>
-              <a:t>This is the technical differentiator and the hardest thing in the product. Most vendors have one engine and an SDK that approximates it. Divergence between them is the classic source of disputed decisions.</a:t>
+              <a:t>This is the technical differentiator and the hardest thing in the product. Most vendors have one engine and an SDK that approximates it. Divergence between them is the classic source of disputed decisions.
+BE PRECISE IF PRESSED — the corpora do not all cover all five. The OPERATOR contract (12 operators, 90 cases) is the one that runs through all five engines. The 600-condition stress rule x 135 cases runs through Python, Rust, Kotlin and Dart — not TypeScript, whose job is browser preview. Scorecards (173 cases) run through Python, TypeScript, Kotlin and Dart. Say 'every engine is held to a shared generated corpus', which is true, rather than 'every corpus runs on every engine', which is not.</a:t>
             </a:r>
             <a:endParaRPr lang="en-US" dirty="0"/>
           </a:p>
@@ -9176,7 +9177,7 @@
                 <a:ea typeface="Calibri" pitchFamily="34" charset="-122"/>
                 <a:cs typeface="Calibri" pitchFamily="34" charset="-120"/>
               </a:rPr>
-              <a:t>600</a:t>
+              <a:t>90</a:t>
             </a:r>
             <a:endParaRPr lang="en-US" sz="2800" dirty="0"/>
           </a:p>
@@ -9218,7 +9219,7 @@
                 <a:ea typeface="Calibri" pitchFamily="34" charset="-122"/>
                 <a:cs typeface="Calibri" pitchFamily="34" charset="-120"/>
               </a:rPr>
-              <a:t>conditions in a single generated rule</a:t>
+              <a:t>operator cases — through all five engines</a:t>
             </a:r>
             <a:endParaRPr lang="en-US" sz="1150" dirty="0"/>
           </a:p>
@@ -9257,7 +9258,7 @@
                 <a:ea typeface="Calibri" pitchFamily="34" charset="-122"/>
                 <a:cs typeface="Calibri" pitchFamily="34" charset="-120"/>
               </a:rPr>
-              <a:t>135</a:t>
+              <a:t>600</a:t>
             </a:r>
             <a:endParaRPr lang="en-US" sz="2800" dirty="0"/>
           </a:p>
@@ -9299,7 +9300,7 @@
                 <a:ea typeface="Calibri" pitchFamily="34" charset="-122"/>
                 <a:cs typeface="Calibri" pitchFamily="34" charset="-120"/>
               </a:rPr>
-              <a:t>input cases run through all five</a:t>
+              <a:t>conditions in one generated stress rule</a:t>
             </a:r>
             <a:endParaRPr lang="en-US" sz="1150" dirty="0"/>
           </a:p>
@@ -9461,7 +9462,7 @@
                 <a:ea typeface="Calibri" pitchFamily="34" charset="-122"/>
                 <a:cs typeface="Calibri" pitchFamily="34" charset="-120"/>
               </a:rPr>
-              <a:t>Why it matters to you: the score your branch app shows offline is the score your server recorded. No “the mobile engine rounds differently” incident, because that incident fails CI.</a:t>
+              <a:t>Why it matters to you: the score your branch app shows offline is the score your server recorded. No “the mobile engine rounds differently” incident, because that incident fails the build.</a:t>
             </a:r>
             <a:endParaRPr lang="en-US" sz="1250" dirty="0"/>
           </a:p>

--- a/docs/deck/RuleMind-AI.pptx
+++ b/docs/deck/RuleMind-AI.pptx
@@ -1164,7 +1164,8 @@
           <a:p>
             <a:r>
               <a:rPr lang="en-US" dirty="0"/>
-              <a:t>This slide wins deals with technical buyers. Every item on the right is a real, current limitation taken from the repository's own notes — not a softened version. If asked about the 48% optimisation: it is a flag that makes decisions faster but is not yet proven to produce identical results, so it stays off.</a:t>
+              <a:t>This slide wins deals with technical buyers. Every item on the right is a real, current limitation taken from the repository's own notes — not a softened version.
+On the optimisation: COMPUTE_ONLY_USED_VARS computes only the variables a policy can actually reach — 92.8% less work on the serving path, 76.0% on the full path, measured in-process with alternating arms. It IS proven correct: both decision paths produce identical outcomes and identical computed-variable sets, mutation-checked in both directions, with the full 1,928-test suite green twice with it on. It stays off by default for one reason, and it is not correctness: it shrinks the recorded variable set from the whole catalog to what the policy read. That is a change to YOUR audit surface, so it is your decision to make, not a default we impose.</a:t>
             </a:r>
             <a:endParaRPr lang="en-US" dirty="0"/>
           </a:p>
@@ -3669,7 +3670,7 @@
                 <a:ea typeface="Calibri" pitchFamily="34" charset="-122"/>
                 <a:cs typeface="Calibri" pitchFamily="34" charset="-120"/>
               </a:rPr>
-              <a:t>A latency optimisation measured at 48% is held back until it is proven correct</a:t>
+              <a:t>A 76-93% optimisation ships OFF by default — it shrinks what the decision record stores</a:t>
             </a:r>
             <a:endParaRPr lang="en-US" sz="1200" dirty="0"/>
           </a:p>

--- a/docs/deck/RuleMind-AI.pptx
+++ b/docs/deck/RuleMind-AI.pptx
@@ -10818,7 +10818,7 @@
                 <a:ea typeface="Calibri" pitchFamily="34" charset="-122"/>
                 <a:cs typeface="Calibri" pitchFamily="34" charset="-120"/>
               </a:rPr>
-              <a:t>~350 MB</a:t>
+              <a:t>388 MiB</a:t>
             </a:r>
             <a:endParaRPr lang="en-US" sz="2300" dirty="0"/>
           </a:p>
@@ -10860,7 +10860,7 @@
                 <a:ea typeface="Calibri" pitchFamily="34" charset="-122"/>
                 <a:cs typeface="Calibri" pitchFamily="34" charset="-120"/>
               </a:rPr>
-              <a:t>API container resident, two workers</a:t>
+              <a:t>API resident, two uvicorn workers</a:t>
             </a:r>
             <a:endParaRPr lang="en-US" sz="1150" dirty="0"/>
           </a:p>

--- a/docs/deck/RuleMind-AI.pptx
+++ b/docs/deck/RuleMind-AI.pptx
@@ -1518,7 +1518,8 @@
           <a:p>
             <a:r>
               <a:rPr lang="en-US" dirty="0"/>
-              <a:t>The closing line is the point of the slide. Every capability here is authored, not deployed, and every one leaves an audit trail naming who did it.</a:t>
+              <a:t>The closing line is the point of the slide. Every capability here is authored, not deployed, and every one leaves an audit trail naming who did it.
+'With approvals' means real two-person control: promotion to production is REFUSED if the same member promoted it to UAT (main.py promote_entity). The actor on the ledger is the AUTHENTICATED principal, not a client-supplied label, which is what makes that check worth anything. One nuance if asked: dual control is per-workspace and OFF by default (engine_config.require_dual_control) — it is a control you switch on, not one we impose.</a:t>
             </a:r>
             <a:endParaRPr lang="en-US" dirty="0"/>
           </a:p>

--- a/docs/deck/RuleMind-AI.pptx
+++ b/docs/deck/RuleMind-AI.pptx
@@ -241,10 +241,10 @@
                 <c:formatCode>General</c:formatCode>
                 <c:ptCount val="7"/>
                 <c:pt idx="0">
-                  <c:v>1920</c:v>
+                  <c:v>1928</c:v>
                 </c:pt>
                 <c:pt idx="1">
-                  <c:v>1920</c:v>
+                  <c:v>1928</c:v>
                 </c:pt>
                 <c:pt idx="2">
                   <c:v>462</c:v>
@@ -2679,7 +2679,7 @@
                 <a:ea typeface="Calibri" pitchFamily="34" charset="-122"/>
                 <a:cs typeface="Calibri" pitchFamily="34" charset="-120"/>
               </a:rPr>
-              <a:t>4,608</a:t>
+              <a:t>4,624</a:t>
             </a:r>
             <a:endParaRPr lang="en-US" sz="3200" dirty="0"/>
           </a:p>
@@ -9725,7 +9725,7 @@
                 <a:ea typeface="Calibri" pitchFamily="34" charset="-122"/>
                 <a:cs typeface="Calibri" pitchFamily="34" charset="-120"/>
               </a:rPr>
-              <a:t>4,608</a:t>
+              <a:t>4,624</a:t>
             </a:r>
             <a:endParaRPr lang="en-US" sz="3400" dirty="0"/>
           </a:p>
